--- a/assets/figures-editable/c3-c4/c4-e35.pptx
+++ b/assets/figures-editable/c3-c4/c4-e35.pptx
@@ -3104,8 +3104,8 @@
         </p:nvSpPr>
         <p:spPr>
           <a:xfrm>
-            <a:off x="274320" y="137160"/>
-            <a:ext cx="11612880" cy="365760"/>
+            <a:off x="274320" y="118872"/>
+            <a:ext cx="11612880" cy="340105"/>
           </a:xfrm>
           <a:prstGeom prst="rect">
             <a:avLst/>
@@ -3114,7 +3114,7 @@
           <a:effectLst/>
         </p:spPr>
         <p:txBody>
-          <a:bodyPr wrap="square" lIns="27432" rIns="27432" tIns="18288" bIns="18288" anchor="ctr">
+          <a:bodyPr wrap="none" lIns="18288" rIns="18288" tIns="18288" bIns="18288" anchor="t">
             <a:spAutoFit/>
           </a:bodyPr>
           <a:lstStyle/>
@@ -3125,7 +3125,7 @@
               </a:spcAft>
             </a:pPr>
             <a:r>
-              <a:rPr sz="2100" b="0" i="0">
+              <a:rPr sz="1900" b="1" i="0">
                 <a:solidFill>
                   <a:srgbClr val="8EDBD4"/>
                 </a:solidFill>
@@ -3138,142 +3138,14 @@
       </p:sp>
       <p:sp>
         <p:nvSpPr>
-          <p:cNvPr id="3" name="C4-E35 rect 1" descr="sci-ppt:o001"/>
-          <p:cNvSpPr/>
+          <p:cNvPr id="3" name="C4-E35 text 1" descr="sci-ppt:o001"/>
+          <p:cNvSpPr txBox="1"/>
           <p:nvPr/>
         </p:nvSpPr>
         <p:spPr>
           <a:xfrm>
-            <a:off x="1005840" y="1280160"/>
-            <a:ext cx="9144000" cy="365760"/>
-          </a:xfrm>
-          <a:prstGeom prst="rect">
-            <a:avLst/>
-          </a:prstGeom>
-          <a:solidFill>
-            <a:srgbClr val="213E4B"/>
-          </a:solidFill>
-          <a:ln w="19050">
-            <a:solidFill>
-              <a:srgbClr val="B4C7D2"/>
-            </a:solidFill>
-          </a:ln>
-          <a:effectLst/>
-        </p:spPr>
-        <p:txBody>
-          <a:bodyPr rtlCol="0" anchor="ctr"/>
-          <a:lstStyle/>
-          <a:p>
-            <a:pPr algn="ctr"/>
-          </a:p>
-        </p:txBody>
-      </p:sp>
-      <p:cxnSp>
-        <p:nvCxnSpPr>
-          <p:cNvPr id="4" name="C4-E35 arrow 2" descr="sci-ppt:o002"/>
-          <p:cNvCxnSpPr/>
-          <p:nvPr/>
-        </p:nvCxnSpPr>
-        <p:spPr>
-          <a:xfrm flipV="1">
-            <a:off x="2743200" y="1737360"/>
-            <a:ext cx="0" cy="1097280"/>
-          </a:xfrm>
-          <a:prstGeom prst="line">
-            <a:avLst/>
-          </a:prstGeom>
-          <a:ln w="25400">
-            <a:solidFill>
-              <a:srgbClr val="8EDBD4"/>
-            </a:solidFill>
-            <a:headEnd type="none" w="med" len="med"/>
-            <a:tailEnd type="triangle" w="med" len="med"/>
-          </a:ln>
-          <a:effectLst/>
-        </p:spPr>
-      </p:cxnSp>
-      <p:cxnSp>
-        <p:nvCxnSpPr>
-          <p:cNvPr id="5" name="C4-E35 arrow 3" descr="sci-ppt:o003"/>
-          <p:cNvCxnSpPr/>
-          <p:nvPr/>
-        </p:nvCxnSpPr>
-        <p:spPr>
-          <a:xfrm flipV="1">
-            <a:off x="5486400" y="1737360"/>
-            <a:ext cx="0" cy="1097280"/>
-          </a:xfrm>
-          <a:prstGeom prst="line">
-            <a:avLst/>
-          </a:prstGeom>
-          <a:ln w="25400">
-            <a:solidFill>
-              <a:srgbClr val="8EDBD4"/>
-            </a:solidFill>
-            <a:headEnd type="none" w="med" len="med"/>
-            <a:tailEnd type="triangle" w="med" len="med"/>
-          </a:ln>
-          <a:effectLst/>
-        </p:spPr>
-      </p:cxnSp>
-      <p:cxnSp>
-        <p:nvCxnSpPr>
-          <p:cNvPr id="6" name="C4-E35 arrow 4" descr="sci-ppt:o004"/>
-          <p:cNvCxnSpPr/>
-          <p:nvPr/>
-        </p:nvCxnSpPr>
-        <p:spPr>
-          <a:xfrm flipV="1">
-            <a:off x="8229600" y="1737360"/>
-            <a:ext cx="0" cy="1097280"/>
-          </a:xfrm>
-          <a:prstGeom prst="line">
-            <a:avLst/>
-          </a:prstGeom>
-          <a:ln w="25400">
-            <a:solidFill>
-              <a:srgbClr val="8EDBD4"/>
-            </a:solidFill>
-            <a:headEnd type="none" w="med" len="med"/>
-            <a:tailEnd type="triangle" w="med" len="med"/>
-          </a:ln>
-          <a:effectLst/>
-        </p:spPr>
-      </p:cxnSp>
-      <p:cxnSp>
-        <p:nvCxnSpPr>
-          <p:cNvPr id="7" name="C4-E35 arrow 5" descr="sci-ppt:o005"/>
-          <p:cNvCxnSpPr/>
-          <p:nvPr/>
-        </p:nvCxnSpPr>
-        <p:spPr>
-          <a:xfrm>
-            <a:off x="9601200" y="1691640"/>
-            <a:ext cx="0" cy="868680"/>
-          </a:xfrm>
-          <a:prstGeom prst="line">
-            <a:avLst/>
-          </a:prstGeom>
-          <a:ln w="25400">
-            <a:solidFill>
-              <a:srgbClr val="8EDBD4"/>
-            </a:solidFill>
-            <a:headEnd type="none" w="med" len="med"/>
-            <a:tailEnd type="triangle" w="med" len="med"/>
-          </a:ln>
-          <a:effectLst/>
-        </p:spPr>
-      </p:cxnSp>
-      <p:sp>
-        <p:nvSpPr>
-          <p:cNvPr id="8" name="C4-E35 text 6" descr="sci-ppt:o006"/>
-          <p:cNvSpPr txBox="1"/>
-          <p:nvPr/>
-        </p:nvSpPr>
-        <p:spPr>
-          <a:xfrm>
-            <a:off x="9829800" y="2011680"/>
-            <a:ext cx="1828800" cy="548640"/>
+            <a:off x="457200" y="914400"/>
+            <a:ext cx="11247120" cy="254889"/>
           </a:xfrm>
           <a:prstGeom prst="rect">
             <a:avLst/>
@@ -3282,7 +3154,7 @@
           <a:effectLst/>
         </p:spPr>
         <p:txBody>
-          <a:bodyPr wrap="square" lIns="27432" rIns="27432" tIns="18288" bIns="18288" anchor="ctr">
+          <a:bodyPr wrap="none" lIns="18288" rIns="18288" tIns="18288" bIns="18288" anchor="t">
             <a:spAutoFit/>
           </a:bodyPr>
           <a:lstStyle/>
@@ -3293,43 +3165,59 @@
               </a:spcAft>
             </a:pPr>
             <a:r>
-              <a:rPr sz="1600" b="0" i="0">
+              <a:rPr sz="1350" b="1" i="0">
                 <a:solidFill>
-                  <a:srgbClr val="E7F0F3"/>
+                  <a:srgbClr val="8EDBD4"/>
                 </a:solidFill>
                 <a:latin typeface="Arial"/>
               </a:rPr>
-              <a:t>n_f ↓</a:t>
-            </a:r>
-          </a:p>
-          <a:p>
-            <a:pPr algn="l">
-              <a:spcAft>
-                <a:spcPts val="0"/>
-              </a:spcAft>
-            </a:pPr>
-            <a:r>
-              <a:rPr sz="1600" b="0" i="0">
-                <a:solidFill>
-                  <a:srgbClr val="E7F0F3"/>
-                </a:solidFill>
-                <a:latin typeface="Arial"/>
-              </a:rPr>
-              <a:t>solid → liquid</a:t>
-            </a:r>
-          </a:p>
-        </p:txBody>
-      </p:sp>
-      <p:sp>
-        <p:nvSpPr>
-          <p:cNvPr id="9" name="C4-E35 text 7" descr="sci-ppt:o007"/>
+              <a:t>Defence 1: load, impulse and work are three different quantities</a:t>
+            </a:r>
+          </a:p>
+        </p:txBody>
+      </p:sp>
+      <p:sp>
+        <p:nvSpPr>
+          <p:cNvPr id="4" name="C4-E35 round_rect 2" descr="sci-ppt:o002"/>
+          <p:cNvSpPr/>
+          <p:nvPr/>
+        </p:nvSpPr>
+        <p:spPr>
+          <a:xfrm>
+            <a:off x="457200" y="1371600"/>
+            <a:ext cx="3611880" cy="3017520"/>
+          </a:xfrm>
+          <a:prstGeom prst="roundRect">
+            <a:avLst/>
+          </a:prstGeom>
+          <a:solidFill>
+            <a:srgbClr val="213E4B"/>
+          </a:solidFill>
+          <a:ln w="20320">
+            <a:solidFill>
+              <a:srgbClr val="7FC8F8"/>
+            </a:solidFill>
+          </a:ln>
+          <a:effectLst/>
+        </p:spPr>
+        <p:txBody>
+          <a:bodyPr rtlCol="0" anchor="ctr"/>
+          <a:lstStyle/>
+          <a:p>
+            <a:pPr algn="ctr"/>
+          </a:p>
+        </p:txBody>
+      </p:sp>
+      <p:sp>
+        <p:nvSpPr>
+          <p:cNvPr id="5" name="C4-E35 text 3" descr="sci-ppt:o003"/>
           <p:cNvSpPr txBox="1"/>
           <p:nvPr/>
         </p:nvSpPr>
         <p:spPr>
           <a:xfrm>
-            <a:off x="1005840" y="731520"/>
-            <a:ext cx="9144000" cy="365760"/>
+            <a:off x="566928" y="1426464"/>
+            <a:ext cx="3392424" cy="262636"/>
           </a:xfrm>
           <a:prstGeom prst="rect">
             <a:avLst/>
@@ -3338,7 +3226,7 @@
           <a:effectLst/>
         </p:spPr>
         <p:txBody>
-          <a:bodyPr wrap="square" lIns="27432" rIns="27432" tIns="18288" bIns="18288" anchor="ctr">
+          <a:bodyPr wrap="none" lIns="18288" rIns="18288" tIns="18288" bIns="18288" anchor="t">
             <a:spAutoFit/>
           </a:bodyPr>
           <a:lstStyle/>
@@ -3349,27 +3237,27 @@
               </a:spcAft>
             </a:pPr>
             <a:r>
-              <a:rPr sz="1800" b="0" i="0">
+              <a:rPr sz="1400" b="1" i="0">
                 <a:solidFill>
-                  <a:srgbClr val="E7F0F3"/>
+                  <a:srgbClr val="7FC8F8"/>
                 </a:solidFill>
                 <a:latin typeface="Arial"/>
               </a:rPr>
-              <a:t>Film / solid; positive departure and velocity v_f ↑</a:t>
-            </a:r>
-          </a:p>
-        </p:txBody>
-      </p:sp>
-      <p:sp>
-        <p:nvSpPr>
-          <p:cNvPr id="10" name="C4-E35 text 8" descr="sci-ppt:o008"/>
+              <a:t>traction</a:t>
+            </a:r>
+          </a:p>
+        </p:txBody>
+      </p:sp>
+      <p:sp>
+        <p:nvSpPr>
+          <p:cNvPr id="6" name="C4-E35 text 4" descr="sci-ppt:o004"/>
           <p:cNvSpPr txBox="1"/>
           <p:nvPr/>
         </p:nvSpPr>
         <p:spPr>
           <a:xfrm>
-            <a:off x="1188720" y="3108960"/>
-            <a:ext cx="9144000" cy="457200"/>
+            <a:off x="548640" y="1920240"/>
+            <a:ext cx="3429000" cy="247142"/>
           </a:xfrm>
           <a:prstGeom prst="rect">
             <a:avLst/>
@@ -3378,60 +3266,38 @@
           <a:effectLst/>
         </p:spPr>
         <p:txBody>
-          <a:bodyPr wrap="square" lIns="27432" rIns="27432" tIns="18288" bIns="18288" anchor="ctr">
+          <a:bodyPr wrap="none" lIns="18288" rIns="18288" tIns="18288" bIns="18288" anchor="t">
             <a:spAutoFit/>
           </a:bodyPr>
           <a:lstStyle/>
           <a:p>
-            <a:pPr algn="l">
+            <a:pPr algn="ctr">
               <a:spcAft>
                 <a:spcPts val="0"/>
               </a:spcAft>
             </a:pPr>
             <a:r>
-              <a:rPr sz="1800" b="0" i="0">
+              <a:rPr sz="1300" b="1" i="0">
                 <a:solidFill>
-                  <a:srgbClr val="8EDBD4"/>
+                  <a:srgbClr val="E7F0F3"/>
                 </a:solidFill>
                 <a:latin typeface="Arial"/>
               </a:rPr>
-              <a:t>Liquid below: t_l = T_l n_f; pressure traction opposes n_f.</a:t>
-            </a:r>
-          </a:p>
-        </p:txBody>
-      </p:sp>
-      <p:cxnSp>
-        <p:nvCxnSpPr>
-          <p:cNvPr id="11" name="C4-E35 line 9" descr="sci-ppt:o009"/>
-          <p:cNvCxnSpPr/>
+              <a:t>tₗ = Tₗ n_f</a:t>
+            </a:r>
+          </a:p>
+        </p:txBody>
+      </p:sp>
+      <p:sp>
+        <p:nvSpPr>
+          <p:cNvPr id="7" name="C4-E35 text 5" descr="sci-ppt:o005"/>
+          <p:cNvSpPr txBox="1"/>
           <p:nvPr/>
-        </p:nvCxnSpPr>
+        </p:nvSpPr>
         <p:spPr>
           <a:xfrm>
-            <a:off x="274320" y="3977639"/>
-            <a:ext cx="11612880" cy="0"/>
-          </a:xfrm>
-          <a:prstGeom prst="line">
-            <a:avLst/>
-          </a:prstGeom>
-          <a:ln w="12700">
-            <a:solidFill>
-              <a:srgbClr val="405967"/>
-            </a:solidFill>
-          </a:ln>
-          <a:effectLst/>
-        </p:spPr>
-      </p:cxnSp>
-      <p:sp>
-        <p:nvSpPr>
-          <p:cNvPr id="12" name="C4-E35 text 10" descr="sci-ppt:o010"/>
-          <p:cNvSpPr txBox="1"/>
-          <p:nvPr/>
-        </p:nvSpPr>
-        <p:spPr>
-          <a:xfrm>
-            <a:off x="320040" y="4096512"/>
-            <a:ext cx="5715000" cy="246888"/>
+            <a:off x="548640" y="2697480"/>
+            <a:ext cx="3429000" cy="239395"/>
           </a:xfrm>
           <a:prstGeom prst="rect">
             <a:avLst/>
@@ -3440,38 +3306,38 @@
           <a:effectLst/>
         </p:spPr>
         <p:txBody>
-          <a:bodyPr wrap="square" lIns="27432" rIns="27432" tIns="18288" bIns="18288" anchor="ctr">
+          <a:bodyPr wrap="none" lIns="18288" rIns="18288" tIns="18288" bIns="18288" anchor="t">
             <a:spAutoFit/>
           </a:bodyPr>
           <a:lstStyle/>
           <a:p>
-            <a:pPr algn="l">
+            <a:pPr algn="ctr">
               <a:spcAft>
                 <a:spcPts val="0"/>
               </a:spcAft>
             </a:pPr>
             <a:r>
-              <a:rPr sz="1150" b="0" i="0">
+              <a:rPr sz="1250" b="1" i="0">
                 <a:solidFill>
-                  <a:srgbClr val="B4C7D2"/>
+                  <a:srgbClr val="7FC8F8"/>
                 </a:solidFill>
                 <a:latin typeface="Arial"/>
               </a:rPr>
-              <a:t>• T_l, n_f → t_l at exposed face</a:t>
-            </a:r>
-          </a:p>
-        </p:txBody>
-      </p:sp>
-      <p:sp>
-        <p:nvSpPr>
-          <p:cNvPr id="13" name="C4-E35 text 11" descr="sci-ppt:o011"/>
+              <a:t>unit: Pa (local)</a:t>
+            </a:r>
+          </a:p>
+        </p:txBody>
+      </p:sp>
+      <p:sp>
+        <p:nvSpPr>
+          <p:cNvPr id="8" name="C4-E35 text 6" descr="sci-ppt:o006"/>
           <p:cNvSpPr txBox="1"/>
           <p:nvPr/>
         </p:nvSpPr>
         <p:spPr>
           <a:xfrm>
-            <a:off x="6217920" y="4096512"/>
-            <a:ext cx="5715000" cy="246888"/>
+            <a:off x="548640" y="3291840"/>
+            <a:ext cx="3429000" cy="231648"/>
           </a:xfrm>
           <a:prstGeom prst="rect">
             <a:avLst/>
@@ -3480,38 +3346,70 @@
           <a:effectLst/>
         </p:spPr>
         <p:txBody>
-          <a:bodyPr wrap="square" lIns="27432" rIns="27432" tIns="18288" bIns="18288" anchor="ctr">
+          <a:bodyPr wrap="none" lIns="18288" rIns="18288" tIns="18288" bIns="18288" anchor="t">
             <a:spAutoFit/>
           </a:bodyPr>
           <a:lstStyle/>
           <a:p>
-            <a:pPr algn="l">
+            <a:pPr algn="ctr">
               <a:spcAft>
                 <a:spcPts val="0"/>
               </a:spcAft>
             </a:pPr>
             <a:r>
-              <a:rPr sz="1150" b="0" i="0">
+              <a:rPr sz="1200" b="0" i="0">
                 <a:solidFill>
                   <a:srgbClr val="B4C7D2"/>
                 </a:solidFill>
                 <a:latin typeface="Arial"/>
               </a:rPr>
-              <a:t>• A_f(t), t_a → t_b — footprint and event</a:t>
-            </a:r>
-          </a:p>
-        </p:txBody>
-      </p:sp>
-      <p:sp>
-        <p:nvSpPr>
-          <p:cNvPr id="14" name="C4-E35 text 12" descr="sci-ppt:o012"/>
+              <a:t>what the film feels at a point</a:t>
+            </a:r>
+          </a:p>
+        </p:txBody>
+      </p:sp>
+      <p:sp>
+        <p:nvSpPr>
+          <p:cNvPr id="9" name="C4-E35 round_rect 7" descr="sci-ppt:o007"/>
+          <p:cNvSpPr/>
+          <p:nvPr/>
+        </p:nvSpPr>
+        <p:spPr>
+          <a:xfrm>
+            <a:off x="4251960" y="1371600"/>
+            <a:ext cx="3611880" cy="3017520"/>
+          </a:xfrm>
+          <a:prstGeom prst="roundRect">
+            <a:avLst/>
+          </a:prstGeom>
+          <a:solidFill>
+            <a:srgbClr val="213E4B"/>
+          </a:solidFill>
+          <a:ln w="20320">
+            <a:solidFill>
+              <a:srgbClr val="F2B880"/>
+            </a:solidFill>
+          </a:ln>
+          <a:effectLst/>
+        </p:spPr>
+        <p:txBody>
+          <a:bodyPr rtlCol="0" anchor="ctr"/>
+          <a:lstStyle/>
+          <a:p>
+            <a:pPr algn="ctr"/>
+          </a:p>
+        </p:txBody>
+      </p:sp>
+      <p:sp>
+        <p:nvSpPr>
+          <p:cNvPr id="10" name="C4-E35 text 8" descr="sci-ppt:o008"/>
           <p:cNvSpPr txBox="1"/>
           <p:nvPr/>
         </p:nvSpPr>
         <p:spPr>
           <a:xfrm>
-            <a:off x="320040" y="4329684"/>
-            <a:ext cx="5715000" cy="246888"/>
+            <a:off x="4361688" y="1426464"/>
+            <a:ext cx="3392424" cy="262636"/>
           </a:xfrm>
           <a:prstGeom prst="rect">
             <a:avLst/>
@@ -3520,7 +3418,7 @@
           <a:effectLst/>
         </p:spPr>
         <p:txBody>
-          <a:bodyPr wrap="square" lIns="27432" rIns="27432" tIns="18288" bIns="18288" anchor="ctr">
+          <a:bodyPr wrap="none" lIns="18288" rIns="18288" tIns="18288" bIns="18288" anchor="t">
             <a:spAutoFit/>
           </a:bodyPr>
           <a:lstStyle/>
@@ -3531,27 +3429,27 @@
               </a:spcAft>
             </a:pPr>
             <a:r>
-              <a:rPr sz="1150" b="0" i="0">
+              <a:rPr sz="1400" b="1" i="0">
                 <a:solidFill>
-                  <a:srgbClr val="B4C7D2"/>
+                  <a:srgbClr val="F2B880"/>
                 </a:solidFill>
                 <a:latin typeface="Arial"/>
               </a:rPr>
-              <a:t>• I_l — force-time integral</a:t>
-            </a:r>
-          </a:p>
-        </p:txBody>
-      </p:sp>
-      <p:sp>
-        <p:nvSpPr>
-          <p:cNvPr id="15" name="C4-E35 text 13" descr="sci-ppt:o013"/>
+              <a:t>impulse</a:t>
+            </a:r>
+          </a:p>
+        </p:txBody>
+      </p:sp>
+      <p:sp>
+        <p:nvSpPr>
+          <p:cNvPr id="11" name="C4-E35 text 9" descr="sci-ppt:o009"/>
           <p:cNvSpPr txBox="1"/>
           <p:nvPr/>
         </p:nvSpPr>
         <p:spPr>
           <a:xfrm>
-            <a:off x="6217920" y="4329684"/>
-            <a:ext cx="5715000" cy="246888"/>
+            <a:off x="4343400" y="1920240"/>
+            <a:ext cx="3429000" cy="247142"/>
           </a:xfrm>
           <a:prstGeom prst="rect">
             <a:avLst/>
@@ -3560,38 +3458,38 @@
           <a:effectLst/>
         </p:spPr>
         <p:txBody>
-          <a:bodyPr wrap="square" lIns="27432" rIns="27432" tIns="18288" bIns="18288" anchor="ctr">
+          <a:bodyPr wrap="none" lIns="18288" rIns="18288" tIns="18288" bIns="18288" anchor="t">
             <a:spAutoFit/>
           </a:bodyPr>
           <a:lstStyle/>
           <a:p>
-            <a:pPr algn="l">
+            <a:pPr algn="ctr">
               <a:spcAft>
                 <a:spcPts val="0"/>
               </a:spcAft>
             </a:pPr>
             <a:r>
-              <a:rPr sz="1150" b="0" i="0">
+              <a:rPr sz="1300" b="1" i="0">
                 <a:solidFill>
-                  <a:srgbClr val="B4C7D2"/>
+                  <a:srgbClr val="E7F0F3"/>
                 </a:solidFill>
                 <a:latin typeface="Arial"/>
               </a:rPr>
-              <a:t>• v_f → W_l requires motion</a:t>
-            </a:r>
-          </a:p>
-        </p:txBody>
-      </p:sp>
-      <p:sp>
-        <p:nvSpPr>
-          <p:cNvPr id="16" name="C4-E35 text 14" descr="sci-ppt:o014"/>
+              <a:t>Iₗ = ∫∫ tₗ dA dt</a:t>
+            </a:r>
+          </a:p>
+        </p:txBody>
+      </p:sp>
+      <p:sp>
+        <p:nvSpPr>
+          <p:cNvPr id="12" name="C4-E35 text 10" descr="sci-ppt:o010"/>
           <p:cNvSpPr txBox="1"/>
           <p:nvPr/>
         </p:nvSpPr>
         <p:spPr>
           <a:xfrm>
-            <a:off x="320040" y="5596128"/>
-            <a:ext cx="11430000" cy="292608"/>
+            <a:off x="4343400" y="2697480"/>
+            <a:ext cx="3429000" cy="239395"/>
           </a:xfrm>
           <a:prstGeom prst="rect">
             <a:avLst/>
@@ -3600,38 +3498,38 @@
           <a:effectLst/>
         </p:spPr>
         <p:txBody>
-          <a:bodyPr wrap="square" lIns="27432" rIns="27432" tIns="18288" bIns="18288" anchor="ctr">
+          <a:bodyPr wrap="none" lIns="18288" rIns="18288" tIns="18288" bIns="18288" anchor="t">
             <a:spAutoFit/>
           </a:bodyPr>
           <a:lstStyle/>
           <a:p>
-            <a:pPr algn="l">
+            <a:pPr algn="ctr">
               <a:spcAft>
                 <a:spcPts val="0"/>
               </a:spcAft>
             </a:pPr>
             <a:r>
-              <a:rPr sz="1150" b="0" i="0">
+              <a:rPr sz="1250" b="1" i="0">
                 <a:solidFill>
-                  <a:srgbClr val="8EDBD4"/>
+                  <a:srgbClr val="F2B880"/>
                 </a:solidFill>
                 <a:latin typeface="Arial"/>
               </a:rPr>
-              <a:t>Exposed PVC and buried film are different surfaces.</a:t>
-            </a:r>
-          </a:p>
-        </p:txBody>
-      </p:sp>
-      <p:sp>
-        <p:nvSpPr>
-          <p:cNvPr id="17" name="C4-E35 text 15" descr="sci-ppt:o015"/>
+              <a:t>unit: N s</a:t>
+            </a:r>
+          </a:p>
+        </p:txBody>
+      </p:sp>
+      <p:sp>
+        <p:nvSpPr>
+          <p:cNvPr id="13" name="C4-E35 text 11" descr="sci-ppt:o011"/>
           <p:cNvSpPr txBox="1"/>
           <p:nvPr/>
         </p:nvSpPr>
         <p:spPr>
           <a:xfrm>
-            <a:off x="320040" y="6473952"/>
-            <a:ext cx="11430000" cy="256032"/>
+            <a:off x="4343400" y="3291840"/>
+            <a:ext cx="3429000" cy="231648"/>
           </a:xfrm>
           <a:prstGeom prst="rect">
             <a:avLst/>
@@ -3640,7 +3538,319 @@
           <a:effectLst/>
         </p:spPr>
         <p:txBody>
-          <a:bodyPr wrap="square" lIns="27432" rIns="27432" tIns="18288" bIns="18288" anchor="ctr">
+          <a:bodyPr wrap="none" lIns="18288" rIns="18288" tIns="18288" bIns="18288" anchor="t">
+            <a:spAutoFit/>
+          </a:bodyPr>
+          <a:lstStyle/>
+          <a:p>
+            <a:pPr algn="ctr">
+              <a:spcAft>
+                <a:spcPts val="0"/>
+              </a:spcAft>
+            </a:pPr>
+            <a:r>
+              <a:rPr sz="1200" b="0" i="0">
+                <a:solidFill>
+                  <a:srgbClr val="B4C7D2"/>
+                </a:solidFill>
+                <a:latin typeface="Arial"/>
+              </a:rPr>
+              <a:t>area and time integrated</a:t>
+            </a:r>
+          </a:p>
+        </p:txBody>
+      </p:sp>
+      <p:sp>
+        <p:nvSpPr>
+          <p:cNvPr id="14" name="C4-E35 round_rect 12" descr="sci-ppt:o012"/>
+          <p:cNvSpPr/>
+          <p:nvPr/>
+        </p:nvSpPr>
+        <p:spPr>
+          <a:xfrm>
+            <a:off x="8046720" y="1371600"/>
+            <a:ext cx="3611880" cy="3017520"/>
+          </a:xfrm>
+          <a:prstGeom prst="roundRect">
+            <a:avLst/>
+          </a:prstGeom>
+          <a:solidFill>
+            <a:srgbClr val="213E4B"/>
+          </a:solidFill>
+          <a:ln w="20320">
+            <a:solidFill>
+              <a:srgbClr val="F28BA0"/>
+            </a:solidFill>
+          </a:ln>
+          <a:effectLst/>
+        </p:spPr>
+        <p:txBody>
+          <a:bodyPr rtlCol="0" anchor="ctr"/>
+          <a:lstStyle/>
+          <a:p>
+            <a:pPr algn="ctr"/>
+          </a:p>
+        </p:txBody>
+      </p:sp>
+      <p:sp>
+        <p:nvSpPr>
+          <p:cNvPr id="15" name="C4-E35 text 13" descr="sci-ppt:o013"/>
+          <p:cNvSpPr txBox="1"/>
+          <p:nvPr/>
+        </p:nvSpPr>
+        <p:spPr>
+          <a:xfrm>
+            <a:off x="8156448" y="1426464"/>
+            <a:ext cx="3392424" cy="262636"/>
+          </a:xfrm>
+          <a:prstGeom prst="rect">
+            <a:avLst/>
+          </a:prstGeom>
+          <a:noFill/>
+          <a:effectLst/>
+        </p:spPr>
+        <p:txBody>
+          <a:bodyPr wrap="none" lIns="18288" rIns="18288" tIns="18288" bIns="18288" anchor="t">
+            <a:spAutoFit/>
+          </a:bodyPr>
+          <a:lstStyle/>
+          <a:p>
+            <a:pPr algn="l">
+              <a:spcAft>
+                <a:spcPts val="0"/>
+              </a:spcAft>
+            </a:pPr>
+            <a:r>
+              <a:rPr sz="1400" b="1" i="0">
+                <a:solidFill>
+                  <a:srgbClr val="F28BA0"/>
+                </a:solidFill>
+                <a:latin typeface="Arial"/>
+              </a:rPr>
+              <a:t>work</a:t>
+            </a:r>
+          </a:p>
+        </p:txBody>
+      </p:sp>
+      <p:sp>
+        <p:nvSpPr>
+          <p:cNvPr id="16" name="C4-E35 text 14" descr="sci-ppt:o014"/>
+          <p:cNvSpPr txBox="1"/>
+          <p:nvPr/>
+        </p:nvSpPr>
+        <p:spPr>
+          <a:xfrm>
+            <a:off x="8138160" y="1920240"/>
+            <a:ext cx="3429000" cy="247142"/>
+          </a:xfrm>
+          <a:prstGeom prst="rect">
+            <a:avLst/>
+          </a:prstGeom>
+          <a:noFill/>
+          <a:effectLst/>
+        </p:spPr>
+        <p:txBody>
+          <a:bodyPr wrap="none" lIns="18288" rIns="18288" tIns="18288" bIns="18288" anchor="t">
+            <a:spAutoFit/>
+          </a:bodyPr>
+          <a:lstStyle/>
+          <a:p>
+            <a:pPr algn="ctr">
+              <a:spcAft>
+                <a:spcPts val="0"/>
+              </a:spcAft>
+            </a:pPr>
+            <a:r>
+              <a:rPr sz="1300" b="1" i="0">
+                <a:solidFill>
+                  <a:srgbClr val="E7F0F3"/>
+                </a:solidFill>
+                <a:latin typeface="Arial"/>
+              </a:rPr>
+              <a:t>Wₗ = ∫∫ tₗ·v_f dA dt</a:t>
+            </a:r>
+          </a:p>
+        </p:txBody>
+      </p:sp>
+      <p:sp>
+        <p:nvSpPr>
+          <p:cNvPr id="17" name="C4-E35 text 15" descr="sci-ppt:o015"/>
+          <p:cNvSpPr txBox="1"/>
+          <p:nvPr/>
+        </p:nvSpPr>
+        <p:spPr>
+          <a:xfrm>
+            <a:off x="8138160" y="2697480"/>
+            <a:ext cx="3429000" cy="239395"/>
+          </a:xfrm>
+          <a:prstGeom prst="rect">
+            <a:avLst/>
+          </a:prstGeom>
+          <a:noFill/>
+          <a:effectLst/>
+        </p:spPr>
+        <p:txBody>
+          <a:bodyPr wrap="none" lIns="18288" rIns="18288" tIns="18288" bIns="18288" anchor="t">
+            <a:spAutoFit/>
+          </a:bodyPr>
+          <a:lstStyle/>
+          <a:p>
+            <a:pPr algn="ctr">
+              <a:spcAft>
+                <a:spcPts val="0"/>
+              </a:spcAft>
+            </a:pPr>
+            <a:r>
+              <a:rPr sz="1250" b="1" i="0">
+                <a:solidFill>
+                  <a:srgbClr val="F28BA0"/>
+                </a:solidFill>
+                <a:latin typeface="Arial"/>
+              </a:rPr>
+              <a:t>unit: J</a:t>
+            </a:r>
+          </a:p>
+        </p:txBody>
+      </p:sp>
+      <p:sp>
+        <p:nvSpPr>
+          <p:cNvPr id="18" name="C4-E35 text 16" descr="sci-ppt:o016"/>
+          <p:cNvSpPr txBox="1"/>
+          <p:nvPr/>
+        </p:nvSpPr>
+        <p:spPr>
+          <a:xfrm>
+            <a:off x="8138160" y="3291840"/>
+            <a:ext cx="3429000" cy="231648"/>
+          </a:xfrm>
+          <a:prstGeom prst="rect">
+            <a:avLst/>
+          </a:prstGeom>
+          <a:noFill/>
+          <a:effectLst/>
+        </p:spPr>
+        <p:txBody>
+          <a:bodyPr wrap="none" lIns="18288" rIns="18288" tIns="18288" bIns="18288" anchor="t">
+            <a:spAutoFit/>
+          </a:bodyPr>
+          <a:lstStyle/>
+          <a:p>
+            <a:pPr algn="ctr">
+              <a:spcAft>
+                <a:spcPts val="0"/>
+              </a:spcAft>
+            </a:pPr>
+            <a:r>
+              <a:rPr sz="1200" b="0" i="0">
+                <a:solidFill>
+                  <a:srgbClr val="B4C7D2"/>
+                </a:solidFill>
+                <a:latin typeface="Arial"/>
+              </a:rPr>
+              <a:t>needs surface motion v_f</a:t>
+            </a:r>
+          </a:p>
+        </p:txBody>
+      </p:sp>
+      <p:sp>
+        <p:nvSpPr>
+          <p:cNvPr id="19" name="C4-E35 text 17" descr="sci-ppt:o017"/>
+          <p:cNvSpPr txBox="1"/>
+          <p:nvPr/>
+        </p:nvSpPr>
+        <p:spPr>
+          <a:xfrm>
+            <a:off x="457200" y="4663440"/>
+            <a:ext cx="11247120" cy="247142"/>
+          </a:xfrm>
+          <a:prstGeom prst="rect">
+            <a:avLst/>
+          </a:prstGeom>
+          <a:noFill/>
+          <a:effectLst/>
+        </p:spPr>
+        <p:txBody>
+          <a:bodyPr wrap="none" lIns="18288" rIns="18288" tIns="18288" bIns="18288" anchor="t">
+            <a:spAutoFit/>
+          </a:bodyPr>
+          <a:lstStyle/>
+          <a:p>
+            <a:pPr algn="l">
+              <a:spcAft>
+                <a:spcPts val="0"/>
+              </a:spcAft>
+            </a:pPr>
+            <a:r>
+              <a:rPr sz="1300" b="0" i="0">
+                <a:solidFill>
+                  <a:srgbClr val="F2B880"/>
+                </a:solidFill>
+                <a:latin typeface="Arial"/>
+              </a:rPr>
+              <a:t>Pressure alone says nothing about momentum or energy: duration, footprint and motion decide.</a:t>
+            </a:r>
+          </a:p>
+        </p:txBody>
+      </p:sp>
+      <p:sp>
+        <p:nvSpPr>
+          <p:cNvPr id="20" name="C4-E35 text 18" descr="sci-ppt:o018"/>
+          <p:cNvSpPr txBox="1"/>
+          <p:nvPr/>
+        </p:nvSpPr>
+        <p:spPr>
+          <a:xfrm>
+            <a:off x="457200" y="5212080"/>
+            <a:ext cx="11247120" cy="239395"/>
+          </a:xfrm>
+          <a:prstGeom prst="rect">
+            <a:avLst/>
+          </a:prstGeom>
+          <a:noFill/>
+          <a:effectLst/>
+        </p:spPr>
+        <p:txBody>
+          <a:bodyPr wrap="none" lIns="18288" rIns="18288" tIns="18288" bIns="18288" anchor="t">
+            <a:spAutoFit/>
+          </a:bodyPr>
+          <a:lstStyle/>
+          <a:p>
+            <a:pPr algn="l">
+              <a:spcAft>
+                <a:spcPts val="0"/>
+              </a:spcAft>
+            </a:pPr>
+            <a:r>
+              <a:rPr sz="1250" b="0" i="0">
+                <a:solidFill>
+                  <a:srgbClr val="E7F0F3"/>
+                </a:solidFill>
+                <a:latin typeface="Arial"/>
+              </a:rPr>
+              <a:t>A stiff, immobile wall receives force and impulse but zero work.</a:t>
+            </a:r>
+          </a:p>
+        </p:txBody>
+      </p:sp>
+      <p:sp>
+        <p:nvSpPr>
+          <p:cNvPr id="21" name="C4-E35 text 19" descr="sci-ppt:o019"/>
+          <p:cNvSpPr txBox="1"/>
+          <p:nvPr/>
+        </p:nvSpPr>
+        <p:spPr>
+          <a:xfrm>
+            <a:off x="320040" y="6510528"/>
+            <a:ext cx="11521440" cy="200660"/>
+          </a:xfrm>
+          <a:prstGeom prst="rect">
+            <a:avLst/>
+          </a:prstGeom>
+          <a:noFill/>
+          <a:effectLst/>
+        </p:spPr>
+        <p:txBody>
+          <a:bodyPr wrap="none" lIns="18288" rIns="18288" tIns="18288" bIns="18288" anchor="t">
             <a:spAutoFit/>
           </a:bodyPr>
           <a:lstStyle/>
@@ -3657,7 +3867,7 @@
                 </a:solidFill>
                 <a:latin typeface="Arial"/>
               </a:rPr>
-              <a:t>Model schematic; geometry is not to scale.</a:t>
+              <a:t>Reference formulas of the Defence 1 answer: Eqs. C4-E01 and C4-E02.</a:t>
             </a:r>
           </a:p>
         </p:txBody>
